--- a/Slides/Topic 6 - Artificial Neural Networks.pptx
+++ b/Slides/Topic 6 - Artificial Neural Networks.pptx
@@ -145,162 +145,26 @@
 </p:presentation>
 </file>
 
-<file path=ppt/revisionInfo.xml><?xml version="1.0" encoding="utf-8"?>
-<p1510:revInfo xmlns:a="http://schemas.openxmlformats.org/drawingml/2006/main" xmlns:r="http://schemas.openxmlformats.org/officeDocument/2006/relationships" xmlns:p1510="http://schemas.microsoft.com/office/powerpoint/2015/10/main">
-  <p1510:revLst>
-    <p1510:client id="{13BBDED3-7449-4D4E-9FB9-0ABDA6A06E8B}" v="6" dt="2023-11-28T08:58:23.158"/>
-  </p1510:revLst>
-</p1510:revInfo>
-</file>
-
 <file path=ppt/changesInfos/changesInfo1.xml><?xml version="1.0" encoding="utf-8"?>
 <pc:chgInfo xmlns:a="http://schemas.openxmlformats.org/drawingml/2006/main" xmlns:r="http://schemas.openxmlformats.org/officeDocument/2006/relationships" xmlns:ac="http://schemas.microsoft.com/office/drawing/2013/main/command" xmlns:pc="http://schemas.microsoft.com/office/powerpoint/2013/main/command">
   <pc:docChgLst>
-    <pc:chgData name="Javier Bas Vicente" userId="96bf8a96-3310-496c-8c7e-8a087f977faa" providerId="ADAL" clId="{13BBDED3-7449-4D4E-9FB9-0ABDA6A06E8B}"/>
-    <pc:docChg chg="custSel modSld">
-      <pc:chgData name="Javier Bas Vicente" userId="96bf8a96-3310-496c-8c7e-8a087f977faa" providerId="ADAL" clId="{13BBDED3-7449-4D4E-9FB9-0ABDA6A06E8B}" dt="2023-11-28T10:24:06.438" v="135" actId="20577"/>
+    <pc:chgData name="Javier Bas Vicente" userId="96bf8a96-3310-496c-8c7e-8a087f977faa" providerId="ADAL" clId="{2B536B82-AB7D-4663-BD33-35DAC5C58A24}"/>
+    <pc:docChg chg="modSld">
+      <pc:chgData name="Javier Bas Vicente" userId="96bf8a96-3310-496c-8c7e-8a087f977faa" providerId="ADAL" clId="{2B536B82-AB7D-4663-BD33-35DAC5C58A24}" dt="2025-12-01T09:54:46.527" v="25" actId="6549"/>
       <pc:docMkLst>
         <pc:docMk/>
       </pc:docMkLst>
-      <pc:sldChg chg="modSp">
-        <pc:chgData name="Javier Bas Vicente" userId="96bf8a96-3310-496c-8c7e-8a087f977faa" providerId="ADAL" clId="{13BBDED3-7449-4D4E-9FB9-0ABDA6A06E8B}" dt="2023-11-28T08:58:23.158" v="8" actId="6549"/>
-        <pc:sldMkLst>
-          <pc:docMk/>
-          <pc:sldMk cId="2133384380" sldId="282"/>
-        </pc:sldMkLst>
-        <pc:spChg chg="mod">
-          <ac:chgData name="Javier Bas Vicente" userId="96bf8a96-3310-496c-8c7e-8a087f977faa" providerId="ADAL" clId="{13BBDED3-7449-4D4E-9FB9-0ABDA6A06E8B}" dt="2023-11-28T08:58:23.158" v="8" actId="6549"/>
-          <ac:spMkLst>
-            <pc:docMk/>
-            <pc:sldMk cId="2133384380" sldId="282"/>
-            <ac:spMk id="9" creationId="{FF60499C-0DD9-AF65-653B-E88CD5FBC946}"/>
-          </ac:spMkLst>
-        </pc:spChg>
-      </pc:sldChg>
       <pc:sldChg chg="modSp mod">
-        <pc:chgData name="Javier Bas Vicente" userId="96bf8a96-3310-496c-8c7e-8a087f977faa" providerId="ADAL" clId="{13BBDED3-7449-4D4E-9FB9-0ABDA6A06E8B}" dt="2023-11-28T08:58:02.323" v="7" actId="20577"/>
-        <pc:sldMkLst>
-          <pc:docMk/>
-          <pc:sldMk cId="2655692839" sldId="283"/>
-        </pc:sldMkLst>
-        <pc:spChg chg="mod">
-          <ac:chgData name="Javier Bas Vicente" userId="96bf8a96-3310-496c-8c7e-8a087f977faa" providerId="ADAL" clId="{13BBDED3-7449-4D4E-9FB9-0ABDA6A06E8B}" dt="2023-11-28T08:58:02.323" v="7" actId="20577"/>
-          <ac:spMkLst>
-            <pc:docMk/>
-            <pc:sldMk cId="2655692839" sldId="283"/>
-            <ac:spMk id="9" creationId="{FF60499C-0DD9-AF65-653B-E88CD5FBC946}"/>
-          </ac:spMkLst>
-        </pc:spChg>
-      </pc:sldChg>
-      <pc:sldChg chg="modSp mod">
-        <pc:chgData name="Javier Bas Vicente" userId="96bf8a96-3310-496c-8c7e-8a087f977faa" providerId="ADAL" clId="{13BBDED3-7449-4D4E-9FB9-0ABDA6A06E8B}" dt="2023-11-28T08:57:43.619" v="0" actId="6549"/>
-        <pc:sldMkLst>
-          <pc:docMk/>
-          <pc:sldMk cId="2293202253" sldId="284"/>
-        </pc:sldMkLst>
-        <pc:spChg chg="mod">
-          <ac:chgData name="Javier Bas Vicente" userId="96bf8a96-3310-496c-8c7e-8a087f977faa" providerId="ADAL" clId="{13BBDED3-7449-4D4E-9FB9-0ABDA6A06E8B}" dt="2023-11-28T08:57:43.619" v="0" actId="6549"/>
-          <ac:spMkLst>
-            <pc:docMk/>
-            <pc:sldMk cId="2293202253" sldId="284"/>
-            <ac:spMk id="152" creationId="{B7719AE7-5D76-3CA6-C03E-F772C1896EF4}"/>
-          </ac:spMkLst>
-        </pc:spChg>
-      </pc:sldChg>
-      <pc:sldChg chg="modSp mod">
-        <pc:chgData name="Javier Bas Vicente" userId="96bf8a96-3310-496c-8c7e-8a087f977faa" providerId="ADAL" clId="{13BBDED3-7449-4D4E-9FB9-0ABDA6A06E8B}" dt="2023-11-28T08:59:41.410" v="15" actId="20577"/>
-        <pc:sldMkLst>
-          <pc:docMk/>
-          <pc:sldMk cId="1871642787" sldId="285"/>
-        </pc:sldMkLst>
-        <pc:spChg chg="mod">
-          <ac:chgData name="Javier Bas Vicente" userId="96bf8a96-3310-496c-8c7e-8a087f977faa" providerId="ADAL" clId="{13BBDED3-7449-4D4E-9FB9-0ABDA6A06E8B}" dt="2023-11-28T08:59:41.410" v="15" actId="20577"/>
-          <ac:spMkLst>
-            <pc:docMk/>
-            <pc:sldMk cId="1871642787" sldId="285"/>
-            <ac:spMk id="152" creationId="{B7719AE7-5D76-3CA6-C03E-F772C1896EF4}"/>
-          </ac:spMkLst>
-        </pc:spChg>
-      </pc:sldChg>
-      <pc:sldChg chg="modSp mod">
-        <pc:chgData name="Javier Bas Vicente" userId="96bf8a96-3310-496c-8c7e-8a087f977faa" providerId="ADAL" clId="{13BBDED3-7449-4D4E-9FB9-0ABDA6A06E8B}" dt="2023-11-28T09:02:38.680" v="20" actId="20577"/>
-        <pc:sldMkLst>
-          <pc:docMk/>
-          <pc:sldMk cId="2565942611" sldId="286"/>
-        </pc:sldMkLst>
-        <pc:spChg chg="mod">
-          <ac:chgData name="Javier Bas Vicente" userId="96bf8a96-3310-496c-8c7e-8a087f977faa" providerId="ADAL" clId="{13BBDED3-7449-4D4E-9FB9-0ABDA6A06E8B}" dt="2023-11-28T09:02:38.680" v="20" actId="20577"/>
-          <ac:spMkLst>
-            <pc:docMk/>
-            <pc:sldMk cId="2565942611" sldId="286"/>
-            <ac:spMk id="152" creationId="{B7719AE7-5D76-3CA6-C03E-F772C1896EF4}"/>
-          </ac:spMkLst>
-        </pc:spChg>
-      </pc:sldChg>
-      <pc:sldChg chg="modSp mod">
-        <pc:chgData name="Javier Bas Vicente" userId="96bf8a96-3310-496c-8c7e-8a087f977faa" providerId="ADAL" clId="{13BBDED3-7449-4D4E-9FB9-0ABDA6A06E8B}" dt="2023-11-28T09:04:06.551" v="106" actId="1076"/>
-        <pc:sldMkLst>
-          <pc:docMk/>
-          <pc:sldMk cId="704902515" sldId="287"/>
-        </pc:sldMkLst>
-        <pc:spChg chg="mod">
-          <ac:chgData name="Javier Bas Vicente" userId="96bf8a96-3310-496c-8c7e-8a087f977faa" providerId="ADAL" clId="{13BBDED3-7449-4D4E-9FB9-0ABDA6A06E8B}" dt="2023-11-28T09:03:44.318" v="52" actId="20577"/>
-          <ac:spMkLst>
-            <pc:docMk/>
-            <pc:sldMk cId="704902515" sldId="287"/>
-            <ac:spMk id="152" creationId="{B7719AE7-5D76-3CA6-C03E-F772C1896EF4}"/>
-          </ac:spMkLst>
-        </pc:spChg>
-        <pc:picChg chg="mod">
-          <ac:chgData name="Javier Bas Vicente" userId="96bf8a96-3310-496c-8c7e-8a087f977faa" providerId="ADAL" clId="{13BBDED3-7449-4D4E-9FB9-0ABDA6A06E8B}" dt="2023-11-28T09:04:06.551" v="106" actId="1076"/>
-          <ac:picMkLst>
-            <pc:docMk/>
-            <pc:sldMk cId="704902515" sldId="287"/>
-            <ac:picMk id="5" creationId="{C186697A-206F-ABF1-BA7D-BFEA146C0AF0}"/>
-          </ac:picMkLst>
-        </pc:picChg>
-      </pc:sldChg>
-      <pc:sldChg chg="modSp mod">
-        <pc:chgData name="Javier Bas Vicente" userId="96bf8a96-3310-496c-8c7e-8a087f977faa" providerId="ADAL" clId="{13BBDED3-7449-4D4E-9FB9-0ABDA6A06E8B}" dt="2023-11-28T09:05:47.536" v="127" actId="20577"/>
-        <pc:sldMkLst>
-          <pc:docMk/>
-          <pc:sldMk cId="2904330645" sldId="288"/>
-        </pc:sldMkLst>
-        <pc:spChg chg="mod">
-          <ac:chgData name="Javier Bas Vicente" userId="96bf8a96-3310-496c-8c7e-8a087f977faa" providerId="ADAL" clId="{13BBDED3-7449-4D4E-9FB9-0ABDA6A06E8B}" dt="2023-11-28T09:05:47.536" v="127" actId="20577"/>
-          <ac:spMkLst>
-            <pc:docMk/>
-            <pc:sldMk cId="2904330645" sldId="288"/>
-            <ac:spMk id="152" creationId="{B7719AE7-5D76-3CA6-C03E-F772C1896EF4}"/>
-          </ac:spMkLst>
-        </pc:spChg>
-      </pc:sldChg>
-      <pc:sldChg chg="modSp mod">
-        <pc:chgData name="Javier Bas Vicente" userId="96bf8a96-3310-496c-8c7e-8a087f977faa" providerId="ADAL" clId="{13BBDED3-7449-4D4E-9FB9-0ABDA6A06E8B}" dt="2023-11-28T09:08:26.394" v="130" actId="6549"/>
+        <pc:chgData name="Javier Bas Vicente" userId="96bf8a96-3310-496c-8c7e-8a087f977faa" providerId="ADAL" clId="{2B536B82-AB7D-4663-BD33-35DAC5C58A24}" dt="2025-12-01T09:54:46.527" v="25" actId="6549"/>
         <pc:sldMkLst>
           <pc:docMk/>
           <pc:sldMk cId="1297602367" sldId="289"/>
         </pc:sldMkLst>
         <pc:spChg chg="mod">
-          <ac:chgData name="Javier Bas Vicente" userId="96bf8a96-3310-496c-8c7e-8a087f977faa" providerId="ADAL" clId="{13BBDED3-7449-4D4E-9FB9-0ABDA6A06E8B}" dt="2023-11-28T09:08:26.394" v="130" actId="6549"/>
+          <ac:chgData name="Javier Bas Vicente" userId="96bf8a96-3310-496c-8c7e-8a087f977faa" providerId="ADAL" clId="{2B536B82-AB7D-4663-BD33-35DAC5C58A24}" dt="2025-12-01T09:54:46.527" v="25" actId="6549"/>
           <ac:spMkLst>
             <pc:docMk/>
             <pc:sldMk cId="1297602367" sldId="289"/>
-            <ac:spMk id="152" creationId="{B7719AE7-5D76-3CA6-C03E-F772C1896EF4}"/>
-          </ac:spMkLst>
-        </pc:spChg>
-      </pc:sldChg>
-      <pc:sldChg chg="modSp mod">
-        <pc:chgData name="Javier Bas Vicente" userId="96bf8a96-3310-496c-8c7e-8a087f977faa" providerId="ADAL" clId="{13BBDED3-7449-4D4E-9FB9-0ABDA6A06E8B}" dt="2023-11-28T10:24:06.438" v="135" actId="20577"/>
-        <pc:sldMkLst>
-          <pc:docMk/>
-          <pc:sldMk cId="2347214831" sldId="294"/>
-        </pc:sldMkLst>
-        <pc:spChg chg="mod">
-          <ac:chgData name="Javier Bas Vicente" userId="96bf8a96-3310-496c-8c7e-8a087f977faa" providerId="ADAL" clId="{13BBDED3-7449-4D4E-9FB9-0ABDA6A06E8B}" dt="2023-11-28T10:24:06.438" v="135" actId="20577"/>
-          <ac:spMkLst>
-            <pc:docMk/>
-            <pc:sldMk cId="2347214831" sldId="294"/>
             <ac:spMk id="152" creationId="{B7719AE7-5D76-3CA6-C03E-F772C1896EF4}"/>
           </ac:spMkLst>
         </pc:spChg>
@@ -392,7 +256,7 @@
           <a:p>
             <a:fld id="{B9B1DC7F-8587-4047-9A5D-1FCB6614CAE0}" type="datetimeFigureOut">
               <a:rPr lang="en-US" smtClean="0"/>
-              <a:t>11/28/2023</a:t>
+              <a:t>12/1/2025</a:t>
             </a:fld>
             <a:endParaRPr lang="en-US"/>
           </a:p>
@@ -806,7 +670,7 @@
           <a:p>
             <a:fld id="{A7DB5662-7327-465C-9A70-AD96B7A8D67A}" type="datetimeFigureOut">
               <a:rPr lang="en-US" smtClean="0"/>
-              <a:t>11/28/2023</a:t>
+              <a:t>12/1/2025</a:t>
             </a:fld>
             <a:endParaRPr lang="en-US"/>
           </a:p>
@@ -1004,7 +868,7 @@
           <a:p>
             <a:fld id="{A7DB5662-7327-465C-9A70-AD96B7A8D67A}" type="datetimeFigureOut">
               <a:rPr lang="en-US" smtClean="0"/>
-              <a:t>11/28/2023</a:t>
+              <a:t>12/1/2025</a:t>
             </a:fld>
             <a:endParaRPr lang="en-US"/>
           </a:p>
@@ -1212,7 +1076,7 @@
           <a:p>
             <a:fld id="{A7DB5662-7327-465C-9A70-AD96B7A8D67A}" type="datetimeFigureOut">
               <a:rPr lang="en-US" smtClean="0"/>
-              <a:t>11/28/2023</a:t>
+              <a:t>12/1/2025</a:t>
             </a:fld>
             <a:endParaRPr lang="en-US"/>
           </a:p>
@@ -1410,7 +1274,7 @@
           <a:p>
             <a:fld id="{A7DB5662-7327-465C-9A70-AD96B7A8D67A}" type="datetimeFigureOut">
               <a:rPr lang="en-US" smtClean="0"/>
-              <a:t>11/28/2023</a:t>
+              <a:t>12/1/2025</a:t>
             </a:fld>
             <a:endParaRPr lang="en-US"/>
           </a:p>
@@ -1685,7 +1549,7 @@
           <a:p>
             <a:fld id="{A7DB5662-7327-465C-9A70-AD96B7A8D67A}" type="datetimeFigureOut">
               <a:rPr lang="en-US" smtClean="0"/>
-              <a:t>11/28/2023</a:t>
+              <a:t>12/1/2025</a:t>
             </a:fld>
             <a:endParaRPr lang="en-US"/>
           </a:p>
@@ -1950,7 +1814,7 @@
           <a:p>
             <a:fld id="{A7DB5662-7327-465C-9A70-AD96B7A8D67A}" type="datetimeFigureOut">
               <a:rPr lang="en-US" smtClean="0"/>
-              <a:t>11/28/2023</a:t>
+              <a:t>12/1/2025</a:t>
             </a:fld>
             <a:endParaRPr lang="en-US"/>
           </a:p>
@@ -2362,7 +2226,7 @@
           <a:p>
             <a:fld id="{A7DB5662-7327-465C-9A70-AD96B7A8D67A}" type="datetimeFigureOut">
               <a:rPr lang="en-US" smtClean="0"/>
-              <a:t>11/28/2023</a:t>
+              <a:t>12/1/2025</a:t>
             </a:fld>
             <a:endParaRPr lang="en-US"/>
           </a:p>
@@ -2503,7 +2367,7 @@
           <a:p>
             <a:fld id="{A7DB5662-7327-465C-9A70-AD96B7A8D67A}" type="datetimeFigureOut">
               <a:rPr lang="en-US" smtClean="0"/>
-              <a:t>11/28/2023</a:t>
+              <a:t>12/1/2025</a:t>
             </a:fld>
             <a:endParaRPr lang="en-US"/>
           </a:p>
@@ -2616,7 +2480,7 @@
           <a:p>
             <a:fld id="{A7DB5662-7327-465C-9A70-AD96B7A8D67A}" type="datetimeFigureOut">
               <a:rPr lang="en-US" smtClean="0"/>
-              <a:t>11/28/2023</a:t>
+              <a:t>12/1/2025</a:t>
             </a:fld>
             <a:endParaRPr lang="en-US"/>
           </a:p>
@@ -2927,7 +2791,7 @@
           <a:p>
             <a:fld id="{A7DB5662-7327-465C-9A70-AD96B7A8D67A}" type="datetimeFigureOut">
               <a:rPr lang="en-US" smtClean="0"/>
-              <a:t>11/28/2023</a:t>
+              <a:t>12/1/2025</a:t>
             </a:fld>
             <a:endParaRPr lang="en-US"/>
           </a:p>
@@ -3215,7 +3079,7 @@
           <a:p>
             <a:fld id="{A7DB5662-7327-465C-9A70-AD96B7A8D67A}" type="datetimeFigureOut">
               <a:rPr lang="en-US" smtClean="0"/>
-              <a:t>11/28/2023</a:t>
+              <a:t>12/1/2025</a:t>
             </a:fld>
             <a:endParaRPr lang="en-US"/>
           </a:p>
@@ -3456,7 +3320,7 @@
           <a:p>
             <a:fld id="{A7DB5662-7327-465C-9A70-AD96B7A8D67A}" type="datetimeFigureOut">
               <a:rPr lang="en-US" smtClean="0"/>
-              <a:t>11/28/2023</a:t>
+              <a:t>12/1/2025</a:t>
             </a:fld>
             <a:endParaRPr lang="en-US"/>
           </a:p>
@@ -23480,7 +23344,31 @@
               <a:rPr lang="en-US" sz="1700" dirty="0">
                 <a:latin typeface="+mj-lt"/>
               </a:rPr>
-              <a:t>For multilabel classification (an instance pertaining to more than one class), we would need as many output neurons as positive classes, all using the logistic activation function (not all probabilities sum up to 1!!)</a:t>
+              <a:t>For multi</a:t>
+            </a:r>
+            <a:r>
+              <a:rPr lang="en-US" sz="1700" b="1" dirty="0">
+                <a:latin typeface="+mj-lt"/>
+              </a:rPr>
+              <a:t>label</a:t>
+            </a:r>
+            <a:r>
+              <a:rPr lang="en-US" sz="1700" dirty="0">
+                <a:latin typeface="+mj-lt"/>
+              </a:rPr>
+              <a:t> classification (an instance pertaining to </a:t>
+            </a:r>
+            <a:r>
+              <a:rPr lang="en-US" sz="1700" b="1" dirty="0">
+                <a:latin typeface="+mj-lt"/>
+              </a:rPr>
+              <a:t>more than one class</a:t>
+            </a:r>
+            <a:r>
+              <a:rPr lang="en-US" sz="1700" dirty="0">
+                <a:latin typeface="+mj-lt"/>
+              </a:rPr>
+              <a:t>), we would need as many output neurons as positive classes, all using the logistic activation function (not all probabilities sum up to 1!!)</a:t>
             </a:r>
           </a:p>
           <a:p>
@@ -23495,7 +23383,43 @@
               <a:rPr lang="en-US" sz="1700" dirty="0">
                 <a:latin typeface="+mj-lt"/>
               </a:rPr>
-              <a:t>If each instance can belong only to a single class out of three or more possible classes, then we need one output neuron per class, </a:t>
+              <a:t>If each instance can belong </a:t>
+            </a:r>
+            <a:r>
+              <a:rPr lang="en-US" sz="1700" b="1" dirty="0">
+                <a:latin typeface="+mj-lt"/>
+              </a:rPr>
+              <a:t>only to a single class out </a:t>
+            </a:r>
+            <a:r>
+              <a:rPr lang="en-US" sz="1700" b="1">
+                <a:latin typeface="+mj-lt"/>
+              </a:rPr>
+              <a:t>of several </a:t>
+            </a:r>
+            <a:r>
+              <a:rPr lang="en-US" sz="1700" b="1" dirty="0">
+                <a:latin typeface="+mj-lt"/>
+              </a:rPr>
+              <a:t>possible classes </a:t>
+            </a:r>
+            <a:r>
+              <a:rPr lang="en-US" sz="1700" dirty="0">
+                <a:latin typeface="+mj-lt"/>
+              </a:rPr>
+              <a:t>(multi</a:t>
+            </a:r>
+            <a:r>
+              <a:rPr lang="en-US" sz="1700" b="1" dirty="0">
+                <a:latin typeface="+mj-lt"/>
+              </a:rPr>
+              <a:t>class</a:t>
+            </a:r>
+            <a:r>
+              <a:rPr lang="en-US" sz="1700" dirty="0">
+                <a:latin typeface="+mj-lt"/>
+              </a:rPr>
+              <a:t>), then we need one output neuron per class, </a:t>
             </a:r>
             <a:r>
               <a:rPr lang="en-US" sz="1700" b="1" dirty="0">
@@ -33466,8 +33390,8 @@
           </a:p>
         </p:txBody>
       </p:sp>
-      <mc:AlternateContent xmlns:mc="http://schemas.openxmlformats.org/markup-compatibility/2006">
-        <mc:Choice xmlns:a14="http://schemas.microsoft.com/office/drawing/2010/main" Requires="a14">
+      <mc:AlternateContent xmlns:mc="http://schemas.openxmlformats.org/markup-compatibility/2006" xmlns:a14="http://schemas.microsoft.com/office/drawing/2010/main">
+        <mc:Choice Requires="a14">
           <p:sp>
             <p:nvSpPr>
               <p:cNvPr id="9" name="TextBox 8">
@@ -33909,7 +33833,7 @@
             </p:txBody>
           </p:sp>
         </mc:Choice>
-        <mc:Fallback>
+        <mc:Fallback xmlns="">
           <p:sp>
             <p:nvSpPr>
               <p:cNvPr id="9" name="TextBox 8">
@@ -34872,8 +34796,8 @@
           </a:p>
         </p:txBody>
       </p:sp>
-      <mc:AlternateContent xmlns:mc="http://schemas.openxmlformats.org/markup-compatibility/2006">
-        <mc:Choice xmlns:a14="http://schemas.microsoft.com/office/drawing/2010/main" Requires="a14">
+      <mc:AlternateContent xmlns:mc="http://schemas.openxmlformats.org/markup-compatibility/2006" xmlns:a14="http://schemas.microsoft.com/office/drawing/2010/main">
+        <mc:Choice Requires="a14">
           <p:sp>
             <p:nvSpPr>
               <p:cNvPr id="152" name="Content Placeholder 2">
@@ -35896,7 +35820,7 @@
             </p:txBody>
           </p:sp>
         </mc:Choice>
-        <mc:Fallback>
+        <mc:Fallback xmlns="">
           <p:sp>
             <p:nvSpPr>
               <p:cNvPr id="152" name="Content Placeholder 2">
